--- a/classes/parte-2-criptografia-aplicada/061-introduccion-al-criptoanalisis/clase-061-presentacion.pptx
+++ b/classes/parte-2-criptografia-aplicada/061-introduccion-al-criptoanalisis/clase-061-presentacion.pptx
@@ -17,6 +17,9 @@
     <p:sldId id="265" r:id="rId16"/>
     <p:sldId id="266" r:id="rId17"/>
     <p:sldId id="267" r:id="rId18"/>
+    <p:sldId id="268" r:id="rId19"/>
+    <p:sldId id="269" r:id="rId20"/>
+    <p:sldId id="270" r:id="rId21"/>
   </p:sldIdLst>
   <p:sldSz cx="9144000" cy="6858000" type="screen4x3"/>
   <p:notesSz cx="6858000" cy="9144000"/>
@@ -3198,7 +3201,7 @@
                   <a:srgbClr val="0B3D2E"/>
                 </a:solidFill>
               </a:rPr>
-              <a:t>⚠️ Errores comunes</a:t>
+              <a:t>✍️ Ejercicios</a:t>
             </a:r>
           </a:p>
         </p:txBody>
@@ -3236,67 +3239,82 @@
                   <a:srgbClr val="22282E"/>
                 </a:solidFill>
               </a:rPr>
-              <a:t>•  Suponer que "roto" = "inseguro para todo" — Distingue ataque teórico de práctico</a:t>
-            </a:r>
-          </a:p>
-          <a:p>
-            <a:pPr>
-              <a:spcAft>
-                <a:spcPts val="600"/>
-              </a:spcAft>
-            </a:pPr>
-            <a:r>
-              <a:rPr sz="1500">
-                <a:solidFill>
-                  <a:srgbClr val="22282E"/>
-                </a:solidFill>
-              </a:rPr>
-              <a:t>•  Calcular colisiones con 2ⁿ — Es 2^(n/2) por el cumpleaños</a:t>
-            </a:r>
-          </a:p>
-          <a:p>
-            <a:pPr>
-              <a:spcAft>
-                <a:spcPts val="600"/>
-              </a:spcAft>
-            </a:pPr>
-            <a:r>
-              <a:rPr sz="1500">
-                <a:solidFill>
-                  <a:srgbClr val="22282E"/>
-                </a:solidFill>
-              </a:rPr>
-              <a:t>•  Confiar en un cifrado propio "porque no lo rompí" — La ausencia de tu ataque no prueba seguridad</a:t>
-            </a:r>
-          </a:p>
-          <a:p>
-            <a:pPr>
-              <a:spcAft>
-                <a:spcPts val="600"/>
-              </a:spcAft>
-            </a:pPr>
-            <a:r>
-              <a:rPr sz="1500">
-                <a:solidFill>
-                  <a:srgbClr val="22282E"/>
-                </a:solidFill>
-              </a:rPr>
-              <a:t>•  Ignorar el modelo de ataque — La seguridad depende de las capacidades del adversario</a:t>
-            </a:r>
-          </a:p>
-          <a:p>
-            <a:pPr>
-              <a:spcAft>
-                <a:spcPts val="600"/>
-              </a:spcAft>
-            </a:pPr>
-            <a:r>
-              <a:rPr sz="1500">
-                <a:solidFill>
-                  <a:srgbClr val="22282E"/>
-                </a:solidFill>
-              </a:rPr>
-              <a:t>•  Subestimar side-channels frente a ataques matemáticos — En la práctica, la implementación cae antes</a:t>
+              <a:t>•  Clasifica tres escenarios reales según COA/KPA/CPA/CCA.</a:t>
+            </a:r>
+          </a:p>
+          <a:p>
+            <a:pPr>
+              <a:spcAft>
+                <a:spcPts val="600"/>
+              </a:spcAft>
+            </a:pPr>
+            <a:r>
+              <a:rPr sz="1500">
+                <a:solidFill>
+                  <a:srgbClr val="22282E"/>
+                </a:solidFill>
+              </a:rPr>
+              <a:t>•  Verifica empíricamente la paradoja del cumpleaños para n=32 bits.</a:t>
+            </a:r>
+          </a:p>
+          <a:p>
+            <a:pPr>
+              <a:spcAft>
+                <a:spcPts val="600"/>
+              </a:spcAft>
+            </a:pPr>
+            <a:r>
+              <a:rPr sz="1500">
+                <a:solidFill>
+                  <a:srgbClr val="22282E"/>
+                </a:solidFill>
+              </a:rPr>
+              <a:t>•  Estima el coste en años de romper 128 bits por fuerza bruta con supuestos razonables.</a:t>
+            </a:r>
+          </a:p>
+          <a:p>
+            <a:pPr>
+              <a:spcAft>
+                <a:spcPts val="600"/>
+              </a:spcAft>
+            </a:pPr>
+            <a:r>
+              <a:rPr sz="1500">
+                <a:solidFill>
+                  <a:srgbClr val="22282E"/>
+                </a:solidFill>
+              </a:rPr>
+              <a:t>•  Explica por qué DES (56 bits) es rompible hoy y AES-128 no.</a:t>
+            </a:r>
+          </a:p>
+          <a:p>
+            <a:pPr>
+              <a:spcAft>
+                <a:spcPts val="600"/>
+              </a:spcAft>
+            </a:pPr>
+            <a:r>
+              <a:rPr sz="1500">
+                <a:solidFill>
+                  <a:srgbClr val="22282E"/>
+                </a:solidFill>
+              </a:rPr>
+              <a:t>•  Describe en tus palabras el criptoanálisis diferencial.</a:t>
+            </a:r>
+          </a:p>
+          <a:p>
+            <a:pPr>
+              <a:spcAft>
+                <a:spcPts val="600"/>
+              </a:spcAft>
+            </a:pPr>
+            <a:r>
+              <a:rPr sz="1500">
+                <a:solidFill>
+                  <a:srgbClr val="22282E"/>
+                </a:solidFill>
+              </a:rPr>
+              <a:t>•  Diferencia "roto académicamente" de "roto en la práctica" con un ejemplo.</a:t>
             </a:r>
           </a:p>
         </p:txBody>
@@ -3347,7 +3365,7 @@
                   <a:srgbClr val="0B3D2E"/>
                 </a:solidFill>
               </a:rPr>
-              <a:t>❓ Preguntas frecuentes</a:t>
+              <a:t>📝 Reto verificable</a:t>
             </a:r>
           </a:p>
         </p:txBody>
@@ -3385,82 +3403,7 @@
                   <a:srgbClr val="22282E"/>
                 </a:solidFill>
               </a:rPr>
-              <a:t>•  ❓ ¿Puedo aprender a romper AES?</a:t>
-            </a:r>
-          </a:p>
-          <a:p>
-            <a:pPr>
-              <a:spcAft>
-                <a:spcPts val="600"/>
-              </a:spcAft>
-            </a:pPr>
-            <a:r>
-              <a:rPr sz="1500">
-                <a:solidFill>
-                  <a:srgbClr val="22282E"/>
-                </a:solidFill>
-              </a:rPr>
-              <a:t>•  No de forma práctica; AES resiste todo el criptoanálisis conocido. El valor está en entender cómo se evalúa y por qué confiamos en él.</a:t>
-            </a:r>
-          </a:p>
-          <a:p>
-            <a:pPr>
-              <a:spcAft>
-                <a:spcPts val="600"/>
-              </a:spcAft>
-            </a:pPr>
-            <a:r>
-              <a:rPr sz="1500">
-                <a:solidFill>
-                  <a:srgbClr val="22282E"/>
-                </a:solidFill>
-              </a:rPr>
-              <a:t>•  ❓ ¿Qué significa "128 bits de seguridad"?</a:t>
-            </a:r>
-          </a:p>
-          <a:p>
-            <a:pPr>
-              <a:spcAft>
-                <a:spcPts val="600"/>
-              </a:spcAft>
-            </a:pPr>
-            <a:r>
-              <a:rPr sz="1500">
-                <a:solidFill>
-                  <a:srgbClr val="22282E"/>
-                </a:solidFill>
-              </a:rPr>
-              <a:t>•  Que el mejor ataque conocido requiere del orden de 2¹²⁸ operaciones, inviable con recursos actuales.</a:t>
-            </a:r>
-          </a:p>
-          <a:p>
-            <a:pPr>
-              <a:spcAft>
-                <a:spcPts val="600"/>
-              </a:spcAft>
-            </a:pPr>
-            <a:r>
-              <a:rPr sz="1500">
-                <a:solidFill>
-                  <a:srgbClr val="22282E"/>
-                </a:solidFill>
-              </a:rPr>
-              <a:t>•  ❓ ¿Debería preocuparme por el criptoanálisis diferencial en mi app?</a:t>
-            </a:r>
-          </a:p>
-          <a:p>
-            <a:pPr>
-              <a:spcAft>
-                <a:spcPts val="600"/>
-              </a:spcAft>
-            </a:pPr>
-            <a:r>
-              <a:rPr sz="1500">
-                <a:solidFill>
-                  <a:srgbClr val="22282E"/>
-                </a:solidFill>
-              </a:rPr>
-              <a:t>•  No directamente; usa primitivas estándar bien analizadas. Preocúpate por la implementación y los side-channels.</a:t>
+              <a:t>•  Demuestra experimentalmente la paradoja del cumpleaños: para varios tamaños de salida n, genera valores aleatorios hasta la primera colisión, repite muchas veces y compara la media con 2^(n/2).…</a:t>
             </a:r>
           </a:p>
         </p:txBody>
@@ -3511,7 +3454,7 @@
                   <a:srgbClr val="0B3D2E"/>
                 </a:solidFill>
               </a:rPr>
-              <a:t>🔗 Referencias</a:t>
+              <a:t>⚠️ Errores comunes</a:t>
             </a:r>
           </a:p>
         </p:txBody>
@@ -3549,6 +3492,319 @@
                   <a:srgbClr val="22282E"/>
                 </a:solidFill>
               </a:rPr>
+              <a:t>•  Suponer que "roto" = "inseguro para todo" — Distingue ataque teórico de práctico</a:t>
+            </a:r>
+          </a:p>
+          <a:p>
+            <a:pPr>
+              <a:spcAft>
+                <a:spcPts val="600"/>
+              </a:spcAft>
+            </a:pPr>
+            <a:r>
+              <a:rPr sz="1500">
+                <a:solidFill>
+                  <a:srgbClr val="22282E"/>
+                </a:solidFill>
+              </a:rPr>
+              <a:t>•  Calcular colisiones con 2ⁿ — Es 2^(n/2) por el cumpleaños</a:t>
+            </a:r>
+          </a:p>
+          <a:p>
+            <a:pPr>
+              <a:spcAft>
+                <a:spcPts val="600"/>
+              </a:spcAft>
+            </a:pPr>
+            <a:r>
+              <a:rPr sz="1500">
+                <a:solidFill>
+                  <a:srgbClr val="22282E"/>
+                </a:solidFill>
+              </a:rPr>
+              <a:t>•  Confiar en un cifrado propio "porque no lo rompí" — La ausencia de tu ataque no prueba seguridad</a:t>
+            </a:r>
+          </a:p>
+          <a:p>
+            <a:pPr>
+              <a:spcAft>
+                <a:spcPts val="600"/>
+              </a:spcAft>
+            </a:pPr>
+            <a:r>
+              <a:rPr sz="1500">
+                <a:solidFill>
+                  <a:srgbClr val="22282E"/>
+                </a:solidFill>
+              </a:rPr>
+              <a:t>•  Ignorar el modelo de ataque — La seguridad depende de las capacidades del adversario</a:t>
+            </a:r>
+          </a:p>
+          <a:p>
+            <a:pPr>
+              <a:spcAft>
+                <a:spcPts val="600"/>
+              </a:spcAft>
+            </a:pPr>
+            <a:r>
+              <a:rPr sz="1500">
+                <a:solidFill>
+                  <a:srgbClr val="22282E"/>
+                </a:solidFill>
+              </a:rPr>
+              <a:t>•  Subestimar side-channels frente a ataques matemáticos — En la práctica, la implementación cae antes</a:t>
+            </a:r>
+          </a:p>
+        </p:txBody>
+      </p:sp>
+    </p:spTree>
+  </p:cSld>
+  <p:clrMapOvr>
+    <a:masterClrMapping/>
+  </p:clrMapOvr>
+</p:sld>
+</file>
+
+<file path=ppt/slides/slide13.xml><?xml version="1.0" encoding="utf-8"?>
+<p:sld xmlns:a="http://schemas.openxmlformats.org/drawingml/2006/main" xmlns:p="http://schemas.openxmlformats.org/presentationml/2006/main" xmlns:r="http://schemas.openxmlformats.org/officeDocument/2006/relationships">
+  <p:cSld>
+    <p:spTree>
+      <p:nvGrpSpPr>
+        <p:cNvPr id="1" name=""/>
+        <p:cNvGrpSpPr/>
+        <p:nvPr/>
+      </p:nvGrpSpPr>
+      <p:grpSpPr/>
+      <p:sp>
+        <p:nvSpPr>
+          <p:cNvPr id="2" name="TextBox 1"/>
+          <p:cNvSpPr txBox="1"/>
+          <p:nvPr/>
+        </p:nvSpPr>
+        <p:spPr>
+          <a:xfrm>
+            <a:off x="457200" y="320040"/>
+            <a:ext cx="8229600" cy="822960"/>
+          </a:xfrm>
+          <a:prstGeom prst="rect">
+            <a:avLst/>
+          </a:prstGeom>
+          <a:noFill/>
+        </p:spPr>
+        <p:txBody>
+          <a:bodyPr wrap="square">
+            <a:spAutoFit/>
+          </a:bodyPr>
+          <a:lstStyle/>
+          <a:p>
+            <a:r>
+              <a:rPr sz="2600" b="1">
+                <a:solidFill>
+                  <a:srgbClr val="0B3D2E"/>
+                </a:solidFill>
+              </a:rPr>
+              <a:t>❓ Preguntas frecuentes</a:t>
+            </a:r>
+          </a:p>
+        </p:txBody>
+      </p:sp>
+      <p:sp>
+        <p:nvSpPr>
+          <p:cNvPr id="3" name="TextBox 2"/>
+          <p:cNvSpPr txBox="1"/>
+          <p:nvPr/>
+        </p:nvSpPr>
+        <p:spPr>
+          <a:xfrm>
+            <a:off x="457200" y="1280160"/>
+            <a:ext cx="8229600" cy="4937760"/>
+          </a:xfrm>
+          <a:prstGeom prst="rect">
+            <a:avLst/>
+          </a:prstGeom>
+          <a:noFill/>
+        </p:spPr>
+        <p:txBody>
+          <a:bodyPr wrap="square">
+            <a:spAutoFit/>
+          </a:bodyPr>
+          <a:lstStyle/>
+          <a:p>
+            <a:pPr>
+              <a:spcAft>
+                <a:spcPts val="600"/>
+              </a:spcAft>
+            </a:pPr>
+            <a:r>
+              <a:rPr sz="1500">
+                <a:solidFill>
+                  <a:srgbClr val="22282E"/>
+                </a:solidFill>
+              </a:rPr>
+              <a:t>•  ❓ ¿Puedo aprender a romper AES?</a:t>
+            </a:r>
+          </a:p>
+          <a:p>
+            <a:pPr>
+              <a:spcAft>
+                <a:spcPts val="600"/>
+              </a:spcAft>
+            </a:pPr>
+            <a:r>
+              <a:rPr sz="1500">
+                <a:solidFill>
+                  <a:srgbClr val="22282E"/>
+                </a:solidFill>
+              </a:rPr>
+              <a:t>•  No de forma práctica; AES resiste todo el criptoanálisis conocido. El valor está en entender cómo se evalúa y por qué confiamos en él.</a:t>
+            </a:r>
+          </a:p>
+          <a:p>
+            <a:pPr>
+              <a:spcAft>
+                <a:spcPts val="600"/>
+              </a:spcAft>
+            </a:pPr>
+            <a:r>
+              <a:rPr sz="1500">
+                <a:solidFill>
+                  <a:srgbClr val="22282E"/>
+                </a:solidFill>
+              </a:rPr>
+              <a:t>•  ❓ ¿Qué significa "128 bits de seguridad"?</a:t>
+            </a:r>
+          </a:p>
+          <a:p>
+            <a:pPr>
+              <a:spcAft>
+                <a:spcPts val="600"/>
+              </a:spcAft>
+            </a:pPr>
+            <a:r>
+              <a:rPr sz="1500">
+                <a:solidFill>
+                  <a:srgbClr val="22282E"/>
+                </a:solidFill>
+              </a:rPr>
+              <a:t>•  Que el mejor ataque conocido requiere del orden de 2¹²⁸ operaciones, inviable con recursos actuales.</a:t>
+            </a:r>
+          </a:p>
+          <a:p>
+            <a:pPr>
+              <a:spcAft>
+                <a:spcPts val="600"/>
+              </a:spcAft>
+            </a:pPr>
+            <a:r>
+              <a:rPr sz="1500">
+                <a:solidFill>
+                  <a:srgbClr val="22282E"/>
+                </a:solidFill>
+              </a:rPr>
+              <a:t>•  ❓ ¿Debería preocuparme por el criptoanálisis diferencial en mi app?</a:t>
+            </a:r>
+          </a:p>
+          <a:p>
+            <a:pPr>
+              <a:spcAft>
+                <a:spcPts val="600"/>
+              </a:spcAft>
+            </a:pPr>
+            <a:r>
+              <a:rPr sz="1500">
+                <a:solidFill>
+                  <a:srgbClr val="22282E"/>
+                </a:solidFill>
+              </a:rPr>
+              <a:t>•  No directamente; usa primitivas estándar bien analizadas. Preocúpate por la implementación y los side-channels.</a:t>
+            </a:r>
+          </a:p>
+        </p:txBody>
+      </p:sp>
+    </p:spTree>
+  </p:cSld>
+  <p:clrMapOvr>
+    <a:masterClrMapping/>
+  </p:clrMapOvr>
+</p:sld>
+</file>
+
+<file path=ppt/slides/slide14.xml><?xml version="1.0" encoding="utf-8"?>
+<p:sld xmlns:a="http://schemas.openxmlformats.org/drawingml/2006/main" xmlns:p="http://schemas.openxmlformats.org/presentationml/2006/main" xmlns:r="http://schemas.openxmlformats.org/officeDocument/2006/relationships">
+  <p:cSld>
+    <p:spTree>
+      <p:nvGrpSpPr>
+        <p:cNvPr id="1" name=""/>
+        <p:cNvGrpSpPr/>
+        <p:nvPr/>
+      </p:nvGrpSpPr>
+      <p:grpSpPr/>
+      <p:sp>
+        <p:nvSpPr>
+          <p:cNvPr id="2" name="TextBox 1"/>
+          <p:cNvSpPr txBox="1"/>
+          <p:nvPr/>
+        </p:nvSpPr>
+        <p:spPr>
+          <a:xfrm>
+            <a:off x="457200" y="320040"/>
+            <a:ext cx="8229600" cy="822960"/>
+          </a:xfrm>
+          <a:prstGeom prst="rect">
+            <a:avLst/>
+          </a:prstGeom>
+          <a:noFill/>
+        </p:spPr>
+        <p:txBody>
+          <a:bodyPr wrap="square">
+            <a:spAutoFit/>
+          </a:bodyPr>
+          <a:lstStyle/>
+          <a:p>
+            <a:r>
+              <a:rPr sz="2600" b="1">
+                <a:solidFill>
+                  <a:srgbClr val="0B3D2E"/>
+                </a:solidFill>
+              </a:rPr>
+              <a:t>🔗 Referencias</a:t>
+            </a:r>
+          </a:p>
+        </p:txBody>
+      </p:sp>
+      <p:sp>
+        <p:nvSpPr>
+          <p:cNvPr id="3" name="TextBox 2"/>
+          <p:cNvSpPr txBox="1"/>
+          <p:nvPr/>
+        </p:nvSpPr>
+        <p:spPr>
+          <a:xfrm>
+            <a:off x="457200" y="1280160"/>
+            <a:ext cx="8229600" cy="4937760"/>
+          </a:xfrm>
+          <a:prstGeom prst="rect">
+            <a:avLst/>
+          </a:prstGeom>
+          <a:noFill/>
+        </p:spPr>
+        <p:txBody>
+          <a:bodyPr wrap="square">
+            <a:spAutoFit/>
+          </a:bodyPr>
+          <a:lstStyle/>
+          <a:p>
+            <a:pPr>
+              <a:spcAft>
+                <a:spcPts val="600"/>
+              </a:spcAft>
+            </a:pPr>
+            <a:r>
+              <a:rPr sz="1500">
+                <a:solidFill>
+                  <a:srgbClr val="22282E"/>
+                </a:solidFill>
+              </a:rPr>
               <a:t>•  Aumasson, Serious Cryptography, cap. 3 y 6.</a:t>
             </a:r>
           </a:p>
@@ -3599,6 +3855,81 @@
           </a:p>
         </p:txBody>
       </p:sp>
+    </p:spTree>
+  </p:cSld>
+  <p:clrMapOvr>
+    <a:masterClrMapping/>
+  </p:clrMapOvr>
+</p:sld>
+</file>
+
+<file path=ppt/slides/slide15.xml><?xml version="1.0" encoding="utf-8"?>
+<p:sld xmlns:a="http://schemas.openxmlformats.org/drawingml/2006/main" xmlns:p="http://schemas.openxmlformats.org/presentationml/2006/main" xmlns:r="http://schemas.openxmlformats.org/officeDocument/2006/relationships">
+  <p:cSld>
+    <p:spTree>
+      <p:nvGrpSpPr>
+        <p:cNvPr id="1" name=""/>
+        <p:cNvGrpSpPr/>
+        <p:nvPr/>
+      </p:nvGrpSpPr>
+      <p:grpSpPr/>
+      <p:sp>
+        <p:nvSpPr>
+          <p:cNvPr id="2" name="TextBox 1"/>
+          <p:cNvSpPr txBox="1"/>
+          <p:nvPr/>
+        </p:nvSpPr>
+        <p:spPr>
+          <a:xfrm>
+            <a:off x="457200" y="274320"/>
+            <a:ext cx="8229600" cy="640080"/>
+          </a:xfrm>
+          <a:prstGeom prst="rect">
+            <a:avLst/>
+          </a:prstGeom>
+          <a:noFill/>
+        </p:spPr>
+        <p:txBody>
+          <a:bodyPr wrap="square">
+            <a:spAutoFit/>
+          </a:bodyPr>
+          <a:lstStyle/>
+          <a:p>
+            <a:r>
+              <a:rPr sz="2200" b="1">
+                <a:solidFill>
+                  <a:srgbClr val="0B3D2E"/>
+                </a:solidFill>
+              </a:rPr>
+              <a:t>Diagrama de la clase</a:t>
+            </a:r>
+          </a:p>
+        </p:txBody>
+      </p:sp>
+      <p:pic>
+        <p:nvPicPr>
+          <p:cNvPr id="3" name="Picture 2" descr="177015ae517981d0.png"/>
+          <p:cNvPicPr>
+            <a:picLocks noChangeAspect="1"/>
+          </p:cNvPicPr>
+          <p:nvPr/>
+        </p:nvPicPr>
+        <p:blipFill>
+          <a:blip r:embed="rId2"/>
+          <a:stretch>
+            <a:fillRect/>
+          </a:stretch>
+        </p:blipFill>
+        <p:spPr>
+          <a:xfrm>
+            <a:off x="457200" y="1444752"/>
+            <a:ext cx="8229600" cy="4608576"/>
+          </a:xfrm>
+          <a:prstGeom prst="rect">
+            <a:avLst/>
+          </a:prstGeom>
+        </p:spPr>
+      </p:pic>
     </p:spTree>
   </p:cSld>
   <p:clrMapOvr>
@@ -3683,7 +4014,7 @@
                   <a:srgbClr val="22282E"/>
                 </a:solidFill>
               </a:rPr>
-              <a:t>•  Adquirir una visión panorámica del criptoanálisis: el arte y la ciencia de romper cifrados. El alumno conocerá los modelos de ataque (solo texto cifrado, texto plano conocido, texto plano/cifrado elegido), las técnicas clásicas (frecuencias) y modernas (criptoanálisis diferencial y lineal a nivel conceptual), la paradoja del cumpleaños aplicada a colisiones, y cómo se mide la seguridad en "bits". El objetivo no es romper AES, sino entender cómo piensan quienes diseñan y evalúan primitivas.</a:t>
+              <a:t>•  Adquirir una visión panorámica del criptoanálisis: el arte y la ciencia de romper cifrados. El alumno conocerá los modelos de ataque (solo texto cifrado, texto plano conocido, texto plano/cifrado…</a:t>
             </a:r>
           </a:p>
         </p:txBody>
@@ -4077,7 +4408,7 @@
                   <a:srgbClr val="0B3D2E"/>
                 </a:solidFill>
               </a:rPr>
-              <a:t>📖 Definiciones y características</a:t>
+              <a:t>🧠 Explicación en profundidad</a:t>
             </a:r>
           </a:p>
         </p:txBody>
@@ -4115,97 +4446,97 @@
                   <a:srgbClr val="22282E"/>
                 </a:solidFill>
               </a:rPr>
-              <a:t>•  COA (ciphertext-only): el atacante solo ve texto cifrado. Modelo más débil para el atacante.</a:t>
-            </a:r>
-          </a:p>
-          <a:p>
-            <a:pPr>
-              <a:spcAft>
-                <a:spcPts val="600"/>
-              </a:spcAft>
-            </a:pPr>
-            <a:r>
-              <a:rPr sz="1500">
-                <a:solidFill>
-                  <a:srgbClr val="22282E"/>
-                </a:solidFill>
-              </a:rPr>
-              <a:t>•  KPA (known-plaintext): conoce pares plano/cifrado. CPA (chosen-plaintext): elige los planos a cifrar. CCA (chosen-ciphertext): elige cifrados a descifrar (el más fuerte).</a:t>
-            </a:r>
-          </a:p>
-          <a:p>
-            <a:pPr>
-              <a:spcAft>
-                <a:spcPts val="600"/>
-              </a:spcAft>
-            </a:pPr>
-            <a:r>
-              <a:rPr sz="1500">
-                <a:solidFill>
-                  <a:srgbClr val="22282E"/>
-                </a:solidFill>
-              </a:rPr>
-              <a:t>•  Bits de seguridad: log₂ del esfuerzo del mejor ataque conocido. 128 bits ≈ inviable con tecnología actual.</a:t>
-            </a:r>
-          </a:p>
-          <a:p>
-            <a:pPr>
-              <a:spcAft>
-                <a:spcPts val="600"/>
-              </a:spcAft>
-            </a:pPr>
-            <a:r>
-              <a:rPr sz="1500">
-                <a:solidFill>
-                  <a:srgbClr val="22282E"/>
-                </a:solidFill>
-              </a:rPr>
-              <a:t>•  Paradoja del cumpleaños: las colisiones aparecen alrededor de 2^(n/2) intentos, no 2ⁿ; por eso un hash de 256 bits da ~128 bits frente a colisiones.</a:t>
-            </a:r>
-          </a:p>
-          <a:p>
-            <a:pPr>
-              <a:spcAft>
-                <a:spcPts val="600"/>
-              </a:spcAft>
-            </a:pPr>
-            <a:r>
-              <a:rPr sz="1500">
-                <a:solidFill>
-                  <a:srgbClr val="22282E"/>
-                </a:solidFill>
-              </a:rPr>
-              <a:t>•  Criptoanálisis diferencial: estudia cómo diferencias en la entrada se propagan a la salida para distinguir un cifrado de uno aleatorio.</a:t>
-            </a:r>
-          </a:p>
-          <a:p>
-            <a:pPr>
-              <a:spcAft>
-                <a:spcPts val="600"/>
-              </a:spcAft>
-            </a:pPr>
-            <a:r>
-              <a:rPr sz="1500">
-                <a:solidFill>
-                  <a:srgbClr val="22282E"/>
-                </a:solidFill>
-              </a:rPr>
-              <a:t>•  Criptoanálisis lineal: busca aproximaciones lineales entre bits de entrada, salida y clave con sesgo explotable.</a:t>
-            </a:r>
-          </a:p>
-          <a:p>
-            <a:pPr>
-              <a:spcAft>
-                <a:spcPts val="600"/>
-              </a:spcAft>
-            </a:pPr>
-            <a:r>
-              <a:rPr sz="1500">
-                <a:solidFill>
-                  <a:srgbClr val="22282E"/>
-                </a:solidFill>
-              </a:rPr>
-              <a:t>•  Ataque "roto": cualquier método mejor que la fuerza bruta, aunque siga siendo impracticable; señala margen erosionado.</a:t>
+              <a:t>•  El criptoanálisis empieza donde acaba la intuición: definiendo con precisión qué puede</a:t>
+            </a:r>
+          </a:p>
+          <a:p>
+            <a:pPr>
+              <a:spcAft>
+                <a:spcPts val="600"/>
+              </a:spcAft>
+            </a:pPr>
+            <a:r>
+              <a:rPr sz="1500">
+                <a:solidFill>
+                  <a:srgbClr val="22282E"/>
+                </a:solidFill>
+              </a:rPr>
+              <a:t>•  hacer el atacante. Los cuatro modelos clásicos van de menos a más poder y no son</a:t>
+            </a:r>
+          </a:p>
+          <a:p>
+            <a:pPr>
+              <a:spcAft>
+                <a:spcPts val="600"/>
+              </a:spcAft>
+            </a:pPr>
+            <a:r>
+              <a:rPr sz="1500">
+                <a:solidFill>
+                  <a:srgbClr val="22282E"/>
+                </a:solidFill>
+              </a:rPr>
+              <a:t>•  académicos, describen situaciones reales. En COA (ciphertext-only) el adversario solo</a:t>
+            </a:r>
+          </a:p>
+          <a:p>
+            <a:pPr>
+              <a:spcAft>
+                <a:spcPts val="600"/>
+              </a:spcAft>
+            </a:pPr>
+            <a:r>
+              <a:rPr sz="1500">
+                <a:solidFill>
+                  <a:srgbClr val="22282E"/>
+                </a:solidFill>
+              </a:rPr>
+              <a:t>•  ve texto cifrado: es el espía pasivo. En KPA (known-plaintext) conoce algunos pares</a:t>
+            </a:r>
+          </a:p>
+          <a:p>
+            <a:pPr>
+              <a:spcAft>
+                <a:spcPts val="600"/>
+              </a:spcAft>
+            </a:pPr>
+            <a:r>
+              <a:rPr sz="1500">
+                <a:solidFill>
+                  <a:srgbClr val="22282E"/>
+                </a:solidFill>
+              </a:rPr>
+              <a:t>•  claro-cifrado, lo que ocurre siempre que un protocolo tiene cabeceras fijas o saludos</a:t>
+            </a:r>
+          </a:p>
+          <a:p>
+            <a:pPr>
+              <a:spcAft>
+                <a:spcPts val="600"/>
+              </a:spcAft>
+            </a:pPr>
+            <a:r>
+              <a:rPr sz="1500">
+                <a:solidFill>
+                  <a:srgbClr val="22282E"/>
+                </a:solidFill>
+              </a:rPr>
+              <a:t>•  previsibles. En CPA (chosen-plaintext) puede elegir qué se cifra, que es exactamente</a:t>
+            </a:r>
+          </a:p>
+          <a:p>
+            <a:pPr>
+              <a:spcAft>
+                <a:spcPts val="600"/>
+              </a:spcAft>
+            </a:pPr>
+            <a:r>
+              <a:rPr sz="1500">
+                <a:solidFill>
+                  <a:srgbClr val="22282E"/>
+                </a:solidFill>
+              </a:rPr>
+              <a:t>•  la posición de quien envía un correo a un sistema que lo archiva cifrado. Y en CCA</a:t>
             </a:r>
           </a:p>
         </p:txBody>
@@ -4256,7 +4587,7 @@
                   <a:srgbClr val="0B3D2E"/>
                 </a:solidFill>
               </a:rPr>
-              <a:t>🧰 Herramientas y preparación</a:t>
+              <a:t>📖 Definiciones y características</a:t>
             </a:r>
           </a:p>
         </p:txBody>
@@ -4294,37 +4625,97 @@
                   <a:srgbClr val="22282E"/>
                 </a:solidFill>
               </a:rPr>
-              <a:t>•  pip install numpy matplotlib</a:t>
-            </a:r>
-          </a:p>
-          <a:p>
-            <a:pPr>
-              <a:spcAft>
-                <a:spcPts val="600"/>
-              </a:spcAft>
-            </a:pPr>
-            <a:r>
-              <a:rPr sz="1500">
-                <a:solidFill>
-                  <a:srgbClr val="22282E"/>
-                </a:solidFill>
-              </a:rPr>
-              <a:t>•  python3 --version</a:t>
-            </a:r>
-          </a:p>
-          <a:p>
-            <a:pPr>
-              <a:spcAft>
-                <a:spcPts val="600"/>
-              </a:spcAft>
-            </a:pPr>
-            <a:r>
-              <a:rPr sz="1500">
-                <a:solidFill>
-                  <a:srgbClr val="22282E"/>
-                </a:solidFill>
-              </a:rPr>
-              <a:t>•  Trabajo puramente analítico y local sobre cifrados de juguete y datos propios.</a:t>
+              <a:t>•  COA (ciphertext-only): el atacante solo ve texto cifrado. Modelo más débil para el atacante.</a:t>
+            </a:r>
+          </a:p>
+          <a:p>
+            <a:pPr>
+              <a:spcAft>
+                <a:spcPts val="600"/>
+              </a:spcAft>
+            </a:pPr>
+            <a:r>
+              <a:rPr sz="1500">
+                <a:solidFill>
+                  <a:srgbClr val="22282E"/>
+                </a:solidFill>
+              </a:rPr>
+              <a:t>•  KPA (known-plaintext): conoce pares plano/cifrado. CPA (chosen-plaintext): elige los planos a cifrar. CCA (chosen-ciphertext): elige cifrados a descifrar (el más fuerte).</a:t>
+            </a:r>
+          </a:p>
+          <a:p>
+            <a:pPr>
+              <a:spcAft>
+                <a:spcPts val="600"/>
+              </a:spcAft>
+            </a:pPr>
+            <a:r>
+              <a:rPr sz="1500">
+                <a:solidFill>
+                  <a:srgbClr val="22282E"/>
+                </a:solidFill>
+              </a:rPr>
+              <a:t>•  Bits de seguridad: log₂ del esfuerzo del mejor ataque conocido. 128 bits ≈ inviable con tecnología actual.</a:t>
+            </a:r>
+          </a:p>
+          <a:p>
+            <a:pPr>
+              <a:spcAft>
+                <a:spcPts val="600"/>
+              </a:spcAft>
+            </a:pPr>
+            <a:r>
+              <a:rPr sz="1500">
+                <a:solidFill>
+                  <a:srgbClr val="22282E"/>
+                </a:solidFill>
+              </a:rPr>
+              <a:t>•  Paradoja del cumpleaños: las colisiones aparecen alrededor de 2^(n/2) intentos, no 2ⁿ; por eso un hash de 256 bits da ~128 bits frente a colisiones.</a:t>
+            </a:r>
+          </a:p>
+          <a:p>
+            <a:pPr>
+              <a:spcAft>
+                <a:spcPts val="600"/>
+              </a:spcAft>
+            </a:pPr>
+            <a:r>
+              <a:rPr sz="1500">
+                <a:solidFill>
+                  <a:srgbClr val="22282E"/>
+                </a:solidFill>
+              </a:rPr>
+              <a:t>•  Criptoanálisis diferencial: estudia cómo diferencias en la entrada se propagan a la salida para distinguir un cifrado de uno aleatorio.</a:t>
+            </a:r>
+          </a:p>
+          <a:p>
+            <a:pPr>
+              <a:spcAft>
+                <a:spcPts val="600"/>
+              </a:spcAft>
+            </a:pPr>
+            <a:r>
+              <a:rPr sz="1500">
+                <a:solidFill>
+                  <a:srgbClr val="22282E"/>
+                </a:solidFill>
+              </a:rPr>
+              <a:t>•  Criptoanálisis lineal: busca aproximaciones lineales entre bits de entrada, salida y clave con sesgo explotable.</a:t>
+            </a:r>
+          </a:p>
+          <a:p>
+            <a:pPr>
+              <a:spcAft>
+                <a:spcPts val="600"/>
+              </a:spcAft>
+            </a:pPr>
+            <a:r>
+              <a:rPr sz="1500">
+                <a:solidFill>
+                  <a:srgbClr val="22282E"/>
+                </a:solidFill>
+              </a:rPr>
+              <a:t>•  Ataque "roto": cualquier método mejor que la fuerza bruta, aunque siga siendo impracticable; señala margen erosionado.</a:t>
             </a:r>
           </a:p>
         </p:txBody>
@@ -4375,7 +4766,7 @@
                   <a:srgbClr val="0B3D2E"/>
                 </a:solidFill>
               </a:rPr>
-              <a:t>🧪 Laboratorio guiado</a:t>
+              <a:t>📔 Glosario</a:t>
             </a:r>
           </a:p>
         </p:txBody>
@@ -4413,67 +4804,97 @@
                   <a:srgbClr val="22282E"/>
                 </a:solidFill>
               </a:rPr>
-              <a:t>•  Análisis de frecuencias automatizado. Reutiliza el rompedor de sustitución de la clase 046 y mide cuántos caracteres necesitas para recuperar el texto con fiabilidad; grafica la tasa de acierto frente a la longitud.</a:t>
-            </a:r>
-          </a:p>
-          <a:p>
-            <a:pPr>
-              <a:spcAft>
-                <a:spcPts val="600"/>
-              </a:spcAft>
-            </a:pPr>
-            <a:r>
-              <a:rPr sz="1500">
-                <a:solidFill>
-                  <a:srgbClr val="22282E"/>
-                </a:solidFill>
-              </a:rPr>
-              <a:t>•  Fuerza bruta acotada. Ataca un cifrado con espacio de claves reducido (p. ej. una clave de 24 bits en un cifrado de juguete) y mide el tiempo; extrapola cuánto costaría 56, 128 y 256 bits para interiorizar la inviabilidad.</a:t>
-            </a:r>
-          </a:p>
-          <a:p>
-            <a:pPr>
-              <a:spcAft>
-                <a:spcPts val="600"/>
-              </a:spcAft>
-            </a:pPr>
-            <a:r>
-              <a:rPr sz="1500">
-                <a:solidFill>
-                  <a:srgbClr val="22282E"/>
-                </a:solidFill>
-              </a:rPr>
-              <a:t>•  Paradoja del cumpleaños empírica. Genera hashes truncados a n bits y cuenta cuántos necesitas para una colisión; compara con la predicción 2^(n/2). Grafica los resultados para varios n.</a:t>
-            </a:r>
-          </a:p>
-          <a:p>
-            <a:pPr>
-              <a:spcAft>
-                <a:spcPts val="600"/>
-              </a:spcAft>
-            </a:pPr>
-            <a:r>
-              <a:rPr sz="1500">
-                <a:solidFill>
-                  <a:srgbClr val="22282E"/>
-                </a:solidFill>
-              </a:rPr>
-              <a:t>•  Distinguidor diferencial (juguete). Sobre un cifrado de bloque didáctico de pocas rondas, mide cómo una diferencia fija en la entrada produce diferencias sesgadas en la salida, ilustrando el criptoanálisis diferencial.</a:t>
-            </a:r>
-          </a:p>
-          <a:p>
-            <a:pPr>
-              <a:spcAft>
-                <a:spcPts val="600"/>
-              </a:spcAft>
-            </a:pPr>
-            <a:r>
-              <a:rPr sz="1500">
-                <a:solidFill>
-                  <a:srgbClr val="22282E"/>
-                </a:solidFill>
-              </a:rPr>
-              <a:t>•  Interpreta un titular. Analiza un anuncio del tipo "roto un ataque contra AES reducido a 7 rondas" y explica por qué no afecta a AES completo en la práctica.</a:t>
+              <a:t>•  Término — Definición concisa</a:t>
+            </a:r>
+          </a:p>
+          <a:p>
+            <a:pPr>
+              <a:spcAft>
+                <a:spcPts val="600"/>
+              </a:spcAft>
+            </a:pPr>
+            <a:r>
+              <a:rPr sz="1500">
+                <a:solidFill>
+                  <a:srgbClr val="22282E"/>
+                </a:solidFill>
+              </a:rPr>
+              <a:t>•  Criptoanálisis — Estudio de cómo romper sistemas criptográficos</a:t>
+            </a:r>
+          </a:p>
+          <a:p>
+            <a:pPr>
+              <a:spcAft>
+                <a:spcPts val="600"/>
+              </a:spcAft>
+            </a:pPr>
+            <a:r>
+              <a:rPr sz="1500">
+                <a:solidFill>
+                  <a:srgbClr val="22282E"/>
+                </a:solidFill>
+              </a:rPr>
+              <a:t>•  COA — El adversario solo ve texto cifrado</a:t>
+            </a:r>
+          </a:p>
+          <a:p>
+            <a:pPr>
+              <a:spcAft>
+                <a:spcPts val="600"/>
+              </a:spcAft>
+            </a:pPr>
+            <a:r>
+              <a:rPr sz="1500">
+                <a:solidFill>
+                  <a:srgbClr val="22282E"/>
+                </a:solidFill>
+              </a:rPr>
+              <a:t>•  KPA — Conoce pares de texto claro y su cifrado</a:t>
+            </a:r>
+          </a:p>
+          <a:p>
+            <a:pPr>
+              <a:spcAft>
+                <a:spcPts val="600"/>
+              </a:spcAft>
+            </a:pPr>
+            <a:r>
+              <a:rPr sz="1500">
+                <a:solidFill>
+                  <a:srgbClr val="22282E"/>
+                </a:solidFill>
+              </a:rPr>
+              <a:t>•  CPA — Puede elegir qué textos se cifran; exigencia mínima moderna</a:t>
+            </a:r>
+          </a:p>
+          <a:p>
+            <a:pPr>
+              <a:spcAft>
+                <a:spcPts val="600"/>
+              </a:spcAft>
+            </a:pPr>
+            <a:r>
+              <a:rPr sz="1500">
+                <a:solidFill>
+                  <a:srgbClr val="22282E"/>
+                </a:solidFill>
+              </a:rPr>
+              <a:t>•  CCA — Puede pedir descifrados y observar el resultado</a:t>
+            </a:r>
+          </a:p>
+          <a:p>
+            <a:pPr>
+              <a:spcAft>
+                <a:spcPts val="600"/>
+              </a:spcAft>
+            </a:pPr>
+            <a:r>
+              <a:rPr sz="1500">
+                <a:solidFill>
+                  <a:srgbClr val="22282E"/>
+                </a:solidFill>
+              </a:rPr>
+              <a:t>•  Bits de seguridad — Coste del mejor ataque conocido, como potencia de 2</a:t>
             </a:r>
           </a:p>
         </p:txBody>
@@ -4524,7 +4945,7 @@
                   <a:srgbClr val="0B3D2E"/>
                 </a:solidFill>
               </a:rPr>
-              <a:t>✍️ Ejercicios</a:t>
+              <a:t>🧰 Herramientas y preparación</a:t>
             </a:r>
           </a:p>
         </p:txBody>
@@ -4562,82 +4983,7 @@
                   <a:srgbClr val="22282E"/>
                 </a:solidFill>
               </a:rPr>
-              <a:t>•  Clasifica tres escenarios reales según COA/KPA/CPA/CCA.</a:t>
-            </a:r>
-          </a:p>
-          <a:p>
-            <a:pPr>
-              <a:spcAft>
-                <a:spcPts val="600"/>
-              </a:spcAft>
-            </a:pPr>
-            <a:r>
-              <a:rPr sz="1500">
-                <a:solidFill>
-                  <a:srgbClr val="22282E"/>
-                </a:solidFill>
-              </a:rPr>
-              <a:t>•  Verifica empíricamente la paradoja del cumpleaños para n=32 bits.</a:t>
-            </a:r>
-          </a:p>
-          <a:p>
-            <a:pPr>
-              <a:spcAft>
-                <a:spcPts val="600"/>
-              </a:spcAft>
-            </a:pPr>
-            <a:r>
-              <a:rPr sz="1500">
-                <a:solidFill>
-                  <a:srgbClr val="22282E"/>
-                </a:solidFill>
-              </a:rPr>
-              <a:t>•  Estima el coste en años de romper 128 bits por fuerza bruta con supuestos razonables.</a:t>
-            </a:r>
-          </a:p>
-          <a:p>
-            <a:pPr>
-              <a:spcAft>
-                <a:spcPts val="600"/>
-              </a:spcAft>
-            </a:pPr>
-            <a:r>
-              <a:rPr sz="1500">
-                <a:solidFill>
-                  <a:srgbClr val="22282E"/>
-                </a:solidFill>
-              </a:rPr>
-              <a:t>•  Explica por qué DES (56 bits) es rompible hoy y AES-128 no.</a:t>
-            </a:r>
-          </a:p>
-          <a:p>
-            <a:pPr>
-              <a:spcAft>
-                <a:spcPts val="600"/>
-              </a:spcAft>
-            </a:pPr>
-            <a:r>
-              <a:rPr sz="1500">
-                <a:solidFill>
-                  <a:srgbClr val="22282E"/>
-                </a:solidFill>
-              </a:rPr>
-              <a:t>•  Describe en tus palabras el criptoanálisis diferencial.</a:t>
-            </a:r>
-          </a:p>
-          <a:p>
-            <a:pPr>
-              <a:spcAft>
-                <a:spcPts val="600"/>
-              </a:spcAft>
-            </a:pPr>
-            <a:r>
-              <a:rPr sz="1500">
-                <a:solidFill>
-                  <a:srgbClr val="22282E"/>
-                </a:solidFill>
-              </a:rPr>
-              <a:t>•  Diferencia "roto académicamente" de "roto en la práctica" con un ejemplo.</a:t>
+              <a:t>•  Trabajo puramente analítico y local sobre cifrados de juguete y datos propios.</a:t>
             </a:r>
           </a:p>
         </p:txBody>
@@ -4688,7 +5034,7 @@
                   <a:srgbClr val="0B3D2E"/>
                 </a:solidFill>
               </a:rPr>
-              <a:t>📝 Reto verificable</a:t>
+              <a:t>🧪 Laboratorio guiado</a:t>
             </a:r>
           </a:p>
         </p:txBody>
@@ -4726,7 +5072,67 @@
                   <a:srgbClr val="22282E"/>
                 </a:solidFill>
               </a:rPr>
-              <a:t>•  Demuestra experimentalmente la paradoja del cumpleaños: para varios tamaños de salida n, genera valores aleatorios hasta la primera colisión, repite muchas veces y compara la media con 2^(n/2). Criterio de aceptación: tus mediciones se ajustan al orden de 2^(n/2) (dentro de un margen estadístico), y explicas su implicación para el tamaño de los hashes.</a:t>
+              <a:t>•  Análisis de frecuencias automatizado. Reutiliza el rompedor de sustitución de la clase 046 y mide cuántos caracteres necesitas para recuperar el texto con fiabilidad; grafica la tasa de acierto…</a:t>
+            </a:r>
+          </a:p>
+          <a:p>
+            <a:pPr>
+              <a:spcAft>
+                <a:spcPts val="600"/>
+              </a:spcAft>
+            </a:pPr>
+            <a:r>
+              <a:rPr sz="1500">
+                <a:solidFill>
+                  <a:srgbClr val="22282E"/>
+                </a:solidFill>
+              </a:rPr>
+              <a:t>•  Fuerza bruta acotada. Ataca un cifrado con espacio de claves reducido (p. ej. una clave de 24 bits en un cifrado de juguete) y mide el tiempo; extrapola cuánto costaría 56, 128 y 256 bits para…</a:t>
+            </a:r>
+          </a:p>
+          <a:p>
+            <a:pPr>
+              <a:spcAft>
+                <a:spcPts val="600"/>
+              </a:spcAft>
+            </a:pPr>
+            <a:r>
+              <a:rPr sz="1500">
+                <a:solidFill>
+                  <a:srgbClr val="22282E"/>
+                </a:solidFill>
+              </a:rPr>
+              <a:t>•  Paradoja del cumpleaños empírica. Genera hashes truncados a n bits y cuenta cuántos necesitas para una colisión; compara con la predicción 2^(n/2). Grafica los resultados para varios n.</a:t>
+            </a:r>
+          </a:p>
+          <a:p>
+            <a:pPr>
+              <a:spcAft>
+                <a:spcPts val="600"/>
+              </a:spcAft>
+            </a:pPr>
+            <a:r>
+              <a:rPr sz="1500">
+                <a:solidFill>
+                  <a:srgbClr val="22282E"/>
+                </a:solidFill>
+              </a:rPr>
+              <a:t>•  Distinguidor diferencial (juguete). Sobre un cifrado de bloque didáctico de pocas rondas, mide cómo una diferencia fija en la entrada produce diferencias sesgadas en la salida, ilustrando el…</a:t>
+            </a:r>
+          </a:p>
+          <a:p>
+            <a:pPr>
+              <a:spcAft>
+                <a:spcPts val="600"/>
+              </a:spcAft>
+            </a:pPr>
+            <a:r>
+              <a:rPr sz="1500">
+                <a:solidFill>
+                  <a:srgbClr val="22282E"/>
+                </a:solidFill>
+              </a:rPr>
+              <a:t>•  Interpreta un titular. Analiza un anuncio del tipo "roto un ataque contra AES reducido a 7 rondas" y explica por qué no afecta a AES completo en la práctica.</a:t>
             </a:r>
           </a:p>
         </p:txBody>
